--- a/public/materials/Slides/Welcome.pptx
+++ b/public/materials/Slides/Welcome.pptx
@@ -15,6 +15,11 @@
     <p:sldId id="265" r:id="rId9"/>
     <p:sldId id="262" r:id="rId10"/>
     <p:sldId id="263" r:id="rId11"/>
+    <p:sldId id="267" r:id="rId12"/>
+    <p:sldId id="268" r:id="rId13"/>
+    <p:sldId id="269" r:id="rId14"/>
+    <p:sldId id="270" r:id="rId15"/>
+    <p:sldId id="271" r:id="rId16"/>
   </p:sldIdLst>
   <p:sldSz cx="12192000" cy="6858000"/>
   <p:notesSz cx="7315200" cy="9601200"/>
@@ -268,7 +273,7 @@
           <a:p>
             <a:fld id="{D7B79CFE-5F22-41E0-AA96-16907A103864}" type="datetimeFigureOut">
               <a:rPr lang="en-US" smtClean="0"/>
-              <a:t>7/12/2024</a:t>
+              <a:t>7/13/2026</a:t>
             </a:fld>
             <a:endParaRPr lang="en-US"/>
           </a:p>
@@ -466,7 +471,7 @@
           <a:p>
             <a:fld id="{D7B79CFE-5F22-41E0-AA96-16907A103864}" type="datetimeFigureOut">
               <a:rPr lang="en-US" smtClean="0"/>
-              <a:t>7/12/2024</a:t>
+              <a:t>7/13/2026</a:t>
             </a:fld>
             <a:endParaRPr lang="en-US"/>
           </a:p>
@@ -674,7 +679,7 @@
           <a:p>
             <a:fld id="{D7B79CFE-5F22-41E0-AA96-16907A103864}" type="datetimeFigureOut">
               <a:rPr lang="en-US" smtClean="0"/>
-              <a:t>7/12/2024</a:t>
+              <a:t>7/13/2026</a:t>
             </a:fld>
             <a:endParaRPr lang="en-US"/>
           </a:p>
@@ -872,7 +877,7 @@
           <a:p>
             <a:fld id="{D7B79CFE-5F22-41E0-AA96-16907A103864}" type="datetimeFigureOut">
               <a:rPr lang="en-US" smtClean="0"/>
-              <a:t>7/12/2024</a:t>
+              <a:t>7/13/2026</a:t>
             </a:fld>
             <a:endParaRPr lang="en-US"/>
           </a:p>
@@ -1147,7 +1152,7 @@
           <a:p>
             <a:fld id="{D7B79CFE-5F22-41E0-AA96-16907A103864}" type="datetimeFigureOut">
               <a:rPr lang="en-US" smtClean="0"/>
-              <a:t>7/12/2024</a:t>
+              <a:t>7/13/2026</a:t>
             </a:fld>
             <a:endParaRPr lang="en-US"/>
           </a:p>
@@ -1412,7 +1417,7 @@
           <a:p>
             <a:fld id="{D7B79CFE-5F22-41E0-AA96-16907A103864}" type="datetimeFigureOut">
               <a:rPr lang="en-US" smtClean="0"/>
-              <a:t>7/12/2024</a:t>
+              <a:t>7/13/2026</a:t>
             </a:fld>
             <a:endParaRPr lang="en-US"/>
           </a:p>
@@ -1824,7 +1829,7 @@
           <a:p>
             <a:fld id="{D7B79CFE-5F22-41E0-AA96-16907A103864}" type="datetimeFigureOut">
               <a:rPr lang="en-US" smtClean="0"/>
-              <a:t>7/12/2024</a:t>
+              <a:t>7/13/2026</a:t>
             </a:fld>
             <a:endParaRPr lang="en-US"/>
           </a:p>
@@ -1965,7 +1970,7 @@
           <a:p>
             <a:fld id="{D7B79CFE-5F22-41E0-AA96-16907A103864}" type="datetimeFigureOut">
               <a:rPr lang="en-US" smtClean="0"/>
-              <a:t>7/12/2024</a:t>
+              <a:t>7/13/2026</a:t>
             </a:fld>
             <a:endParaRPr lang="en-US"/>
           </a:p>
@@ -2078,7 +2083,7 @@
           <a:p>
             <a:fld id="{D7B79CFE-5F22-41E0-AA96-16907A103864}" type="datetimeFigureOut">
               <a:rPr lang="en-US" smtClean="0"/>
-              <a:t>7/12/2024</a:t>
+              <a:t>7/13/2026</a:t>
             </a:fld>
             <a:endParaRPr lang="en-US"/>
           </a:p>
@@ -2389,7 +2394,7 @@
           <a:p>
             <a:fld id="{D7B79CFE-5F22-41E0-AA96-16907A103864}" type="datetimeFigureOut">
               <a:rPr lang="en-US" smtClean="0"/>
-              <a:t>7/12/2024</a:t>
+              <a:t>7/13/2026</a:t>
             </a:fld>
             <a:endParaRPr lang="en-US"/>
           </a:p>
@@ -2677,7 +2682,7 @@
           <a:p>
             <a:fld id="{D7B79CFE-5F22-41E0-AA96-16907A103864}" type="datetimeFigureOut">
               <a:rPr lang="en-US" smtClean="0"/>
-              <a:t>7/12/2024</a:t>
+              <a:t>7/13/2026</a:t>
             </a:fld>
             <a:endParaRPr lang="en-US"/>
           </a:p>
@@ -2918,7 +2923,7 @@
           <a:p>
             <a:fld id="{D7B79CFE-5F22-41E0-AA96-16907A103864}" type="datetimeFigureOut">
               <a:rPr lang="en-US" smtClean="0"/>
-              <a:t>7/12/2024</a:t>
+              <a:t>7/13/2026</a:t>
             </a:fld>
             <a:endParaRPr lang="en-US"/>
           </a:p>
@@ -3549,6 +3554,451 @@
 </p:sld>
 </file>
 
+<file path=ppt/slides/slide11.xml><?xml version="1.0" encoding="utf-8"?>
+<p:sld xmlns:a="http://schemas.openxmlformats.org/drawingml/2006/main" xmlns:r="http://schemas.openxmlformats.org/officeDocument/2006/relationships" xmlns:p="http://schemas.openxmlformats.org/presentationml/2006/main">
+  <p:cSld>
+    <p:spTree>
+      <p:nvGrpSpPr>
+        <p:cNvPr id="1" name=""/>
+        <p:cNvGrpSpPr/>
+        <p:nvPr/>
+      </p:nvGrpSpPr>
+      <p:grpSpPr>
+        <a:xfrm>
+          <a:off x="0" y="0"/>
+          <a:ext cx="0" cy="0"/>
+          <a:chOff x="0" y="0"/>
+          <a:chExt cx="0" cy="0"/>
+        </a:xfrm>
+      </p:grpSpPr>
+      <p:sp>
+        <p:nvSpPr>
+          <p:cNvPr id="2" name="Title 1"/>
+          <p:cNvSpPr>
+            <a:spLocks noGrp="1"/>
+          </p:cNvSpPr>
+          <p:nvPr>
+            <p:ph type="ctrTitle"/>
+          </p:nvPr>
+        </p:nvSpPr>
+        <p:spPr/>
+        <p:txBody>
+          <a:bodyPr/>
+          <a:lstStyle/>
+          <a:p>
+            <a:r>
+              <a:rPr dirty="0"/>
+              <a:t>Getting Started with Google </a:t>
+            </a:r>
+            <a:r>
+              <a:rPr dirty="0" err="1"/>
+              <a:t>Colab</a:t>
+            </a:r>
+            <a:endParaRPr dirty="0"/>
+          </a:p>
+        </p:txBody>
+      </p:sp>
+      <p:sp>
+        <p:nvSpPr>
+          <p:cNvPr id="3" name="Subtitle 2"/>
+          <p:cNvSpPr>
+            <a:spLocks noGrp="1"/>
+          </p:cNvSpPr>
+          <p:nvPr>
+            <p:ph type="subTitle" idx="1"/>
+          </p:nvPr>
+        </p:nvSpPr>
+        <p:spPr/>
+        <p:txBody>
+          <a:bodyPr/>
+          <a:lstStyle/>
+          <a:p>
+            <a:r>
+              <a:t>Run R in your browser—no installation required</a:t>
+            </a:r>
+          </a:p>
+        </p:txBody>
+      </p:sp>
+    </p:spTree>
+  </p:cSld>
+  <p:clrMapOvr>
+    <a:masterClrMapping/>
+  </p:clrMapOvr>
+</p:sld>
+</file>
+
+<file path=ppt/slides/slide12.xml><?xml version="1.0" encoding="utf-8"?>
+<p:sld xmlns:a="http://schemas.openxmlformats.org/drawingml/2006/main" xmlns:r="http://schemas.openxmlformats.org/officeDocument/2006/relationships" xmlns:p="http://schemas.openxmlformats.org/presentationml/2006/main">
+  <p:cSld>
+    <p:spTree>
+      <p:nvGrpSpPr>
+        <p:cNvPr id="1" name=""/>
+        <p:cNvGrpSpPr/>
+        <p:nvPr/>
+      </p:nvGrpSpPr>
+      <p:grpSpPr>
+        <a:xfrm>
+          <a:off x="0" y="0"/>
+          <a:ext cx="0" cy="0"/>
+          <a:chOff x="0" y="0"/>
+          <a:chExt cx="0" cy="0"/>
+        </a:xfrm>
+      </p:grpSpPr>
+      <p:sp>
+        <p:nvSpPr>
+          <p:cNvPr id="2" name="Title 1"/>
+          <p:cNvSpPr>
+            <a:spLocks noGrp="1"/>
+          </p:cNvSpPr>
+          <p:nvPr>
+            <p:ph type="title"/>
+          </p:nvPr>
+        </p:nvSpPr>
+        <p:spPr/>
+        <p:txBody>
+          <a:bodyPr/>
+          <a:lstStyle/>
+          <a:p>
+            <a:r>
+              <a:t>Create a Notebook</a:t>
+            </a:r>
+          </a:p>
+        </p:txBody>
+      </p:sp>
+      <p:sp>
+        <p:nvSpPr>
+          <p:cNvPr id="3" name="Content Placeholder 2"/>
+          <p:cNvSpPr>
+            <a:spLocks noGrp="1"/>
+          </p:cNvSpPr>
+          <p:nvPr>
+            <p:ph idx="1"/>
+          </p:nvPr>
+        </p:nvSpPr>
+        <p:spPr/>
+        <p:txBody>
+          <a:bodyPr/>
+          <a:lstStyle/>
+          <a:p>
+            <a:pPr>
+              <a:defRPr sz="2400"/>
+            </a:pPr>
+            <a:r>
+              <a:rPr dirty="0"/>
+              <a:t>Go to colab.google.com</a:t>
+            </a:r>
+          </a:p>
+          <a:p>
+            <a:pPr>
+              <a:defRPr sz="2400"/>
+            </a:pPr>
+            <a:r>
+              <a:rPr dirty="0"/>
+              <a:t>Sign in with Google</a:t>
+            </a:r>
+          </a:p>
+          <a:p>
+            <a:pPr>
+              <a:defRPr sz="2400"/>
+            </a:pPr>
+            <a:r>
+              <a:rPr dirty="0"/>
+              <a:t>New Notebook</a:t>
+            </a:r>
+          </a:p>
+          <a:p>
+            <a:pPr>
+              <a:defRPr sz="2400"/>
+            </a:pPr>
+            <a:r>
+              <a:rPr dirty="0"/>
+              <a:t>Runtime → Change runtime type → R</a:t>
+            </a:r>
+          </a:p>
+        </p:txBody>
+      </p:sp>
+    </p:spTree>
+  </p:cSld>
+  <p:clrMapOvr>
+    <a:masterClrMapping/>
+  </p:clrMapOvr>
+</p:sld>
+</file>
+
+<file path=ppt/slides/slide13.xml><?xml version="1.0" encoding="utf-8"?>
+<p:sld xmlns:a="http://schemas.openxmlformats.org/drawingml/2006/main" xmlns:r="http://schemas.openxmlformats.org/officeDocument/2006/relationships" xmlns:p="http://schemas.openxmlformats.org/presentationml/2006/main">
+  <p:cSld>
+    <p:spTree>
+      <p:nvGrpSpPr>
+        <p:cNvPr id="1" name=""/>
+        <p:cNvGrpSpPr/>
+        <p:nvPr/>
+      </p:nvGrpSpPr>
+      <p:grpSpPr>
+        <a:xfrm>
+          <a:off x="0" y="0"/>
+          <a:ext cx="0" cy="0"/>
+          <a:chOff x="0" y="0"/>
+          <a:chExt cx="0" cy="0"/>
+        </a:xfrm>
+      </p:grpSpPr>
+      <p:sp>
+        <p:nvSpPr>
+          <p:cNvPr id="2" name="Title 1"/>
+          <p:cNvSpPr>
+            <a:spLocks noGrp="1"/>
+          </p:cNvSpPr>
+          <p:nvPr>
+            <p:ph type="title"/>
+          </p:nvPr>
+        </p:nvSpPr>
+        <p:spPr/>
+        <p:txBody>
+          <a:bodyPr/>
+          <a:lstStyle/>
+          <a:p>
+            <a:r>
+              <a:t>Running R Code</a:t>
+            </a:r>
+          </a:p>
+        </p:txBody>
+      </p:sp>
+      <p:sp>
+        <p:nvSpPr>
+          <p:cNvPr id="3" name="Content Placeholder 2"/>
+          <p:cNvSpPr>
+            <a:spLocks noGrp="1"/>
+          </p:cNvSpPr>
+          <p:nvPr>
+            <p:ph idx="1"/>
+          </p:nvPr>
+        </p:nvSpPr>
+        <p:spPr/>
+        <p:txBody>
+          <a:bodyPr/>
+          <a:lstStyle/>
+          <a:p>
+            <a:pPr>
+              <a:defRPr sz="2400"/>
+            </a:pPr>
+            <a:r>
+              <a:t>Type R code in a cell</a:t>
+            </a:r>
+          </a:p>
+          <a:p>
+            <a:pPr>
+              <a:defRPr sz="2400"/>
+            </a:pPr>
+            <a:r>
+              <a:t>Shift+Enter to run</a:t>
+            </a:r>
+          </a:p>
+          <a:p>
+            <a:pPr>
+              <a:defRPr sz="2400"/>
+            </a:pPr>
+            <a:r>
+              <a:t>Add cells with + Code</a:t>
+            </a:r>
+          </a:p>
+        </p:txBody>
+      </p:sp>
+    </p:spTree>
+  </p:cSld>
+  <p:clrMapOvr>
+    <a:masterClrMapping/>
+  </p:clrMapOvr>
+</p:sld>
+</file>
+
+<file path=ppt/slides/slide14.xml><?xml version="1.0" encoding="utf-8"?>
+<p:sld xmlns:a="http://schemas.openxmlformats.org/drawingml/2006/main" xmlns:r="http://schemas.openxmlformats.org/officeDocument/2006/relationships" xmlns:p="http://schemas.openxmlformats.org/presentationml/2006/main">
+  <p:cSld>
+    <p:spTree>
+      <p:nvGrpSpPr>
+        <p:cNvPr id="1" name=""/>
+        <p:cNvGrpSpPr/>
+        <p:nvPr/>
+      </p:nvGrpSpPr>
+      <p:grpSpPr>
+        <a:xfrm>
+          <a:off x="0" y="0"/>
+          <a:ext cx="0" cy="0"/>
+          <a:chOff x="0" y="0"/>
+          <a:chExt cx="0" cy="0"/>
+        </a:xfrm>
+      </p:grpSpPr>
+      <p:sp>
+        <p:nvSpPr>
+          <p:cNvPr id="2" name="Title 1"/>
+          <p:cNvSpPr>
+            <a:spLocks noGrp="1"/>
+          </p:cNvSpPr>
+          <p:nvPr>
+            <p:ph type="title"/>
+          </p:nvPr>
+        </p:nvSpPr>
+        <p:spPr/>
+        <p:txBody>
+          <a:bodyPr/>
+          <a:lstStyle/>
+          <a:p>
+            <a:r>
+              <a:t>Packages &amp; Files</a:t>
+            </a:r>
+          </a:p>
+        </p:txBody>
+      </p:sp>
+      <p:sp>
+        <p:nvSpPr>
+          <p:cNvPr id="3" name="Content Placeholder 2"/>
+          <p:cNvSpPr>
+            <a:spLocks noGrp="1"/>
+          </p:cNvSpPr>
+          <p:nvPr>
+            <p:ph idx="1"/>
+          </p:nvPr>
+        </p:nvSpPr>
+        <p:spPr/>
+        <p:txBody>
+          <a:bodyPr/>
+          <a:lstStyle/>
+          <a:p>
+            <a:pPr>
+              <a:defRPr sz="2400"/>
+            </a:pPr>
+            <a:r>
+              <a:t>install.packages() as needed</a:t>
+            </a:r>
+          </a:p>
+          <a:p>
+            <a:pPr>
+              <a:defRPr sz="2400"/>
+            </a:pPr>
+            <a:r>
+              <a:t>library(...)</a:t>
+            </a:r>
+          </a:p>
+          <a:p>
+            <a:pPr>
+              <a:defRPr sz="2400"/>
+            </a:pPr>
+            <a:r>
+              <a:t>Upload files via Files panel</a:t>
+            </a:r>
+          </a:p>
+          <a:p>
+            <a:pPr>
+              <a:defRPr sz="2400"/>
+            </a:pPr>
+            <a:r>
+              <a:t>Save work in Google Drive</a:t>
+            </a:r>
+          </a:p>
+        </p:txBody>
+      </p:sp>
+    </p:spTree>
+  </p:cSld>
+  <p:clrMapOvr>
+    <a:masterClrMapping/>
+  </p:clrMapOvr>
+</p:sld>
+</file>
+
+<file path=ppt/slides/slide15.xml><?xml version="1.0" encoding="utf-8"?>
+<p:sld xmlns:a="http://schemas.openxmlformats.org/drawingml/2006/main" xmlns:r="http://schemas.openxmlformats.org/officeDocument/2006/relationships" xmlns:p="http://schemas.openxmlformats.org/presentationml/2006/main">
+  <p:cSld>
+    <p:spTree>
+      <p:nvGrpSpPr>
+        <p:cNvPr id="1" name=""/>
+        <p:cNvGrpSpPr/>
+        <p:nvPr/>
+      </p:nvGrpSpPr>
+      <p:grpSpPr>
+        <a:xfrm>
+          <a:off x="0" y="0"/>
+          <a:ext cx="0" cy="0"/>
+          <a:chOff x="0" y="0"/>
+          <a:chExt cx="0" cy="0"/>
+        </a:xfrm>
+      </p:grpSpPr>
+      <p:sp>
+        <p:nvSpPr>
+          <p:cNvPr id="2" name="Title 1"/>
+          <p:cNvSpPr>
+            <a:spLocks noGrp="1"/>
+          </p:cNvSpPr>
+          <p:nvPr>
+            <p:ph type="title"/>
+          </p:nvPr>
+        </p:nvSpPr>
+        <p:spPr/>
+        <p:txBody>
+          <a:bodyPr/>
+          <a:lstStyle/>
+          <a:p>
+            <a:r>
+              <a:t>Sharing &amp; Tips</a:t>
+            </a:r>
+          </a:p>
+        </p:txBody>
+      </p:sp>
+      <p:sp>
+        <p:nvSpPr>
+          <p:cNvPr id="3" name="Content Placeholder 2"/>
+          <p:cNvSpPr>
+            <a:spLocks noGrp="1"/>
+          </p:cNvSpPr>
+          <p:nvPr>
+            <p:ph idx="1"/>
+          </p:nvPr>
+        </p:nvSpPr>
+        <p:spPr/>
+        <p:txBody>
+          <a:bodyPr/>
+          <a:lstStyle/>
+          <a:p>
+            <a:pPr>
+              <a:defRPr sz="2400"/>
+            </a:pPr>
+            <a:r>
+              <a:t>Share like a Google Doc</a:t>
+            </a:r>
+          </a:p>
+          <a:p>
+            <a:pPr>
+              <a:defRPr sz="2400"/>
+            </a:pPr>
+            <a:r>
+              <a:t>View-only for lecture notes</a:t>
+            </a:r>
+          </a:p>
+          <a:p>
+            <a:pPr>
+              <a:defRPr sz="2400"/>
+            </a:pPr>
+            <a:r>
+              <a:t>Students: File → Save a copy in Drive</a:t>
+            </a:r>
+          </a:p>
+          <a:p>
+            <a:pPr>
+              <a:defRPr sz="2400"/>
+            </a:pPr>
+            <a:r>
+              <a:t>Sessions are temporary—save often!</a:t>
+            </a:r>
+          </a:p>
+        </p:txBody>
+      </p:sp>
+    </p:spTree>
+  </p:cSld>
+  <p:clrMapOvr>
+    <a:masterClrMapping/>
+  </p:clrMapOvr>
+</p:sld>
+</file>
+
 <file path=ppt/slides/slide2.xml><?xml version="1.0" encoding="utf-8"?>
 <p:sld xmlns:a="http://schemas.openxmlformats.org/drawingml/2006/main" xmlns:r="http://schemas.openxmlformats.org/officeDocument/2006/relationships" xmlns:p="http://schemas.openxmlformats.org/presentationml/2006/main">
   <p:cSld>
@@ -3806,6 +4256,27 @@
               <a:t>Assignments</a:t>
             </a:r>
           </a:p>
+          <a:p>
+            <a:pPr algn="l"/>
+            <a:r>
+              <a:rPr lang="en-US" sz="3600" dirty="0">
+                <a:latin typeface="Calibri" panose="020F0502020204030204" pitchFamily="34" charset="0"/>
+                <a:cs typeface="Calibri" panose="020F0502020204030204" pitchFamily="34" charset="0"/>
+              </a:rPr>
+              <a:t>Getting Started with Google </a:t>
+            </a:r>
+            <a:r>
+              <a:rPr lang="en-US" sz="3600" dirty="0" err="1">
+                <a:latin typeface="Calibri" panose="020F0502020204030204" pitchFamily="34" charset="0"/>
+                <a:cs typeface="Calibri" panose="020F0502020204030204" pitchFamily="34" charset="0"/>
+              </a:rPr>
+              <a:t>Colab</a:t>
+            </a:r>
+            <a:endParaRPr lang="en-US" sz="3600" b="0" i="0" u="none" strike="noStrike" baseline="0" dirty="0">
+              <a:latin typeface="Calibri" panose="020F0502020204030204" pitchFamily="34" charset="0"/>
+              <a:cs typeface="Calibri" panose="020F0502020204030204" pitchFamily="34" charset="0"/>
+            </a:endParaRPr>
+          </a:p>
         </p:txBody>
       </p:sp>
     </p:spTree>
@@ -4355,24 +4826,59 @@
           <a:p>
             <a:r>
               <a:rPr lang="en-US" dirty="0"/>
-              <a:t>R and </a:t>
+              <a:t>R (</a:t>
             </a:r>
             <a:r>
               <a:rPr lang="en-US" dirty="0" err="1"/>
               <a:t>Rstudio</a:t>
             </a:r>
-            <a:endParaRPr lang="en-US" dirty="0"/>
-          </a:p>
-          <a:p>
             <a:r>
               <a:rPr lang="en-US" dirty="0"/>
-              <a:t>If using a personal laptop, please install prior to first class.</a:t>
-            </a:r>
-          </a:p>
-          <a:p>
+              <a:t>, </a:t>
+            </a:r>
+            <a:r>
+              <a:rPr lang="en-US" dirty="0" err="1"/>
+              <a:t>Colab</a:t>
+            </a:r>
             <a:r>
               <a:rPr lang="en-US" dirty="0"/>
-              <a:t>Update to the newest version.</a:t>
+              <a:t>, whatever)</a:t>
+            </a:r>
+          </a:p>
+          <a:p>
+            <a:r>
+              <a:rPr lang="en-US" dirty="0"/>
+              <a:t>If using </a:t>
+            </a:r>
+            <a:r>
+              <a:rPr lang="en-US" dirty="0" err="1"/>
+              <a:t>Rstudio</a:t>
+            </a:r>
+            <a:r>
+              <a:rPr lang="en-US" dirty="0"/>
+              <a:t>, please install R and </a:t>
+            </a:r>
+            <a:r>
+              <a:rPr lang="en-US" dirty="0" err="1"/>
+              <a:t>Rstudio</a:t>
+            </a:r>
+            <a:r>
+              <a:rPr lang="en-US" dirty="0"/>
+              <a:t> and update to the newest version.</a:t>
+            </a:r>
+          </a:p>
+          <a:p>
+            <a:r>
+              <a:rPr lang="en-US" dirty="0"/>
+              <a:t>I’ll use </a:t>
+            </a:r>
+            <a:r>
+              <a:rPr lang="en-US" dirty="0" err="1"/>
+              <a:t>Colab</a:t>
+            </a:r>
+            <a:r>
+              <a:rPr lang="en-US" dirty="0"/>
+              <a:t>, more in a minute.</a:t>
             </a:r>
           </a:p>
         </p:txBody>
